--- a/courseware/DSA_CH02_Linear_List.pptx
+++ b/courseware/DSA_CH02_Linear_List.pptx
@@ -3335,7 +3335,7 @@
                 <a:latin typeface="Segoe UI"/>
                 <a:ea typeface="微软雅黑"/>
               </a:rPr>
-              <a:t>现代化重制版讲义　代码按 C++17 重写，全部可编译、可运行</a:t>
+              <a:t>现代化重制版讲义　代码按 C++17 重写；code/ 全部单元双档编译运行通过</a:t>
             </a:r>
           </a:p>
         </p:txBody>
@@ -19585,7 +19585,7 @@
                 <a:latin typeface="Segoe UI"/>
                 <a:ea typeface="微软雅黑"/>
               </a:rPr>
-              <a:t>习题（完整题面与参考答案见同名讲义）</a:t>
+              <a:t>习题选讲</a:t>
             </a:r>
           </a:p>
         </p:txBody>
@@ -19664,11 +19664,11 @@
                 <a:spcPts val="0"/>
               </a:spcBef>
               <a:spcAft>
-                <a:spcPts val="1240"/>
-              </a:spcAft>
-            </a:pPr>
-            <a:r>
-              <a:rPr sz="2000" b="0" i="0">
+                <a:spcPts val="1178"/>
+              </a:spcAft>
+            </a:pPr>
+            <a:r>
+              <a:rPr sz="1900" b="0" i="0">
                 <a:solidFill>
                   <a:srgbClr val="242A33"/>
                 </a:solidFill>
@@ -19678,7 +19678,7 @@
               <a:t>•  </a:t>
             </a:r>
             <a:r>
-              <a:rPr sz="2000" b="1" i="0">
+              <a:rPr sz="1900" b="1" i="0">
                 <a:solidFill>
                   <a:srgbClr val="12395B"/>
                 </a:solidFill>
@@ -19688,7 +19688,7 @@
               <a:t>顺序表</a:t>
             </a:r>
             <a:r>
-              <a:rPr sz="2000" b="0" i="0">
+              <a:rPr sz="1900" b="0" i="0">
                 <a:solidFill>
                   <a:srgbClr val="242A33"/>
                 </a:solidFill>
@@ -19707,11 +19707,11 @@
                 <a:spcPts val="0"/>
               </a:spcBef>
               <a:spcAft>
-                <a:spcPts val="1240"/>
-              </a:spcAft>
-            </a:pPr>
-            <a:r>
-              <a:rPr sz="2000" b="0" i="0">
+                <a:spcPts val="1178"/>
+              </a:spcAft>
+            </a:pPr>
+            <a:r>
+              <a:rPr sz="1900" b="0" i="0">
                 <a:solidFill>
                   <a:srgbClr val="242A33"/>
                 </a:solidFill>
@@ -19721,7 +19721,7 @@
               <a:t>•  </a:t>
             </a:r>
             <a:r>
-              <a:rPr sz="2000" b="1" i="0">
+              <a:rPr sz="1900" b="1" i="0">
                 <a:solidFill>
                   <a:srgbClr val="12395B"/>
                 </a:solidFill>
@@ -19731,7 +19731,7 @@
               <a:t>单链表</a:t>
             </a:r>
             <a:r>
-              <a:rPr sz="2000" b="0" i="0">
+              <a:rPr sz="1900" b="0" i="0">
                 <a:solidFill>
                   <a:srgbClr val="242A33"/>
                 </a:solidFill>
@@ -19750,11 +19750,11 @@
                 <a:spcPts val="0"/>
               </a:spcBef>
               <a:spcAft>
-                <a:spcPts val="1240"/>
-              </a:spcAft>
-            </a:pPr>
-            <a:r>
-              <a:rPr sz="2000" b="0" i="0">
+                <a:spcPts val="1178"/>
+              </a:spcAft>
+            </a:pPr>
+            <a:r>
+              <a:rPr sz="1900" b="0" i="0">
                 <a:solidFill>
                   <a:srgbClr val="242A33"/>
                 </a:solidFill>
@@ -19764,7 +19764,7 @@
               <a:t>•  </a:t>
             </a:r>
             <a:r>
-              <a:rPr sz="2000" b="1" i="0">
+              <a:rPr sz="1900" b="1" i="0">
                 <a:solidFill>
                   <a:srgbClr val="12395B"/>
                 </a:solidFill>
@@ -19774,7 +19774,7 @@
               <a:t>归并</a:t>
             </a:r>
             <a:r>
-              <a:rPr sz="2000" b="0" i="0">
+              <a:rPr sz="1900" b="0" i="0">
                 <a:solidFill>
                   <a:srgbClr val="242A33"/>
                 </a:solidFill>
@@ -19784,7 +19784,7 @@
               <a:t>　两个递增单链表归并成一个</a:t>
             </a:r>
             <a:r>
-              <a:rPr sz="2000" b="1" i="0">
+              <a:rPr sz="1900" b="1" i="0">
                 <a:solidFill>
                   <a:srgbClr val="12395B"/>
                 </a:solidFill>
@@ -19794,7 +19794,7 @@
               <a:t>递减</a:t>
             </a:r>
             <a:r>
-              <a:rPr sz="2000" b="0" i="0">
+              <a:rPr sz="1900" b="0" i="0">
                 <a:solidFill>
                   <a:srgbClr val="242A33"/>
                 </a:solidFill>
@@ -19804,7 +19804,7 @@
               <a:t>表 C，</a:t>
             </a:r>
             <a:r>
-              <a:rPr sz="2000" b="1" i="0">
+              <a:rPr sz="1900" b="1" i="0">
                 <a:solidFill>
                   <a:srgbClr val="12395B"/>
                 </a:solidFill>
@@ -19823,11 +19823,11 @@
                 <a:spcPts val="0"/>
               </a:spcBef>
               <a:spcAft>
-                <a:spcPts val="1240"/>
-              </a:spcAft>
-            </a:pPr>
-            <a:r>
-              <a:rPr sz="2000" b="0" i="0">
+                <a:spcPts val="1178"/>
+              </a:spcAft>
+            </a:pPr>
+            <a:r>
+              <a:rPr sz="1900" b="0" i="0">
                 <a:solidFill>
                   <a:srgbClr val="242A33"/>
                 </a:solidFill>
@@ -19837,7 +19837,7 @@
               <a:t>•  </a:t>
             </a:r>
             <a:r>
-              <a:rPr sz="2000" b="1" i="0">
+              <a:rPr sz="1900" b="1" i="0">
                 <a:solidFill>
                   <a:srgbClr val="12395B"/>
                 </a:solidFill>
@@ -19847,7 +19847,7 @@
               <a:t>分割</a:t>
             </a:r>
             <a:r>
-              <a:rPr sz="2000" b="0" i="0">
+              <a:rPr sz="1900" b="0" i="0">
                 <a:solidFill>
                   <a:srgbClr val="242A33"/>
                 </a:solidFill>
@@ -19866,11 +19866,11 @@
                 <a:spcPts val="0"/>
               </a:spcBef>
               <a:spcAft>
-                <a:spcPts val="1240"/>
-              </a:spcAft>
-            </a:pPr>
-            <a:r>
-              <a:rPr sz="2000" b="0" i="0">
+                <a:spcPts val="1178"/>
+              </a:spcAft>
+            </a:pPr>
+            <a:r>
+              <a:rPr sz="1900" b="0" i="0">
                 <a:solidFill>
                   <a:srgbClr val="242A33"/>
                 </a:solidFill>
@@ -19880,7 +19880,7 @@
               <a:t>•  </a:t>
             </a:r>
             <a:r>
-              <a:rPr sz="2000" b="1" i="0">
+              <a:rPr sz="1900" b="1" i="0">
                 <a:solidFill>
                   <a:srgbClr val="12395B"/>
                 </a:solidFill>
@@ -19890,7 +19890,7 @@
               <a:t>上机 1</a:t>
             </a:r>
             <a:r>
-              <a:rPr sz="2000" b="0" i="0">
+              <a:rPr sz="1900" b="0" i="0">
                 <a:solidFill>
                   <a:srgbClr val="242A33"/>
                 </a:solidFill>
@@ -19900,7 +19900,7 @@
               <a:t>　</a:t>
             </a:r>
             <a:r>
-              <a:rPr sz="1879" b="0" i="0">
+              <a:rPr sz="1786" b="0" i="0">
                 <a:solidFill>
                   <a:srgbClr val="242A33"/>
                 </a:solidFill>
@@ -19910,7 +19910,7 @@
               <a:t>O(n)</a:t>
             </a:r>
             <a:r>
-              <a:rPr sz="2000" b="0" i="0">
+              <a:rPr sz="1900" b="0" i="0">
                 <a:solidFill>
                   <a:srgbClr val="242A33"/>
                 </a:solidFill>
@@ -19920,7 +19920,7 @@
               <a:t> 时间、常量辅助空间，非递归</a:t>
             </a:r>
             <a:r>
-              <a:rPr sz="2000" b="1" i="0">
+              <a:rPr sz="1900" b="1" i="0">
                 <a:solidFill>
                   <a:srgbClr val="12395B"/>
                 </a:solidFill>
@@ -19930,7 +19930,7 @@
               <a:t>逆置</a:t>
             </a:r>
             <a:r>
-              <a:rPr sz="2000" b="0" i="0">
+              <a:rPr sz="1900" b="0" i="0">
                 <a:solidFill>
                   <a:srgbClr val="242A33"/>
                 </a:solidFill>
@@ -19949,11 +19949,11 @@
                 <a:spcPts val="0"/>
               </a:spcBef>
               <a:spcAft>
-                <a:spcPts val="1240"/>
-              </a:spcAft>
-            </a:pPr>
-            <a:r>
-              <a:rPr sz="2000" b="0" i="0">
+                <a:spcPts val="1178"/>
+              </a:spcAft>
+            </a:pPr>
+            <a:r>
+              <a:rPr sz="1900" b="0" i="0">
                 <a:solidFill>
                   <a:srgbClr val="242A33"/>
                 </a:solidFill>
@@ -19963,7 +19963,7 @@
               <a:t>•  </a:t>
             </a:r>
             <a:r>
-              <a:rPr sz="2000" b="1" i="0">
+              <a:rPr sz="1900" b="1" i="0">
                 <a:solidFill>
                   <a:srgbClr val="12395B"/>
                 </a:solidFill>
@@ -19973,7 +19973,7 @@
               <a:t>上机 2</a:t>
             </a:r>
             <a:r>
-              <a:rPr sz="2000" b="0" i="0">
+              <a:rPr sz="1900" b="0" i="0">
                 <a:solidFill>
                   <a:srgbClr val="242A33"/>
                 </a:solidFill>
@@ -19983,7 +19983,7 @@
               <a:t>　找单链表的</a:t>
             </a:r>
             <a:r>
-              <a:rPr sz="2000" b="1" i="0">
+              <a:rPr sz="1900" b="1" i="0">
                 <a:solidFill>
                   <a:srgbClr val="12395B"/>
                 </a:solidFill>
@@ -19993,7 +19993,7 @@
               <a:t>倒数第 m 个</a:t>
             </a:r>
             <a:r>
-              <a:rPr sz="2000" b="0" i="0">
+              <a:rPr sz="1900" b="0" i="0">
                 <a:solidFill>
                   <a:srgbClr val="242A33"/>
                 </a:solidFill>
@@ -20012,11 +20012,11 @@
                 <a:spcPts val="0"/>
               </a:spcBef>
               <a:spcAft>
-                <a:spcPts val="1240"/>
-              </a:spcAft>
-            </a:pPr>
-            <a:r>
-              <a:rPr sz="2000" b="0" i="0">
+                <a:spcPts val="1178"/>
+              </a:spcAft>
+            </a:pPr>
+            <a:r>
+              <a:rPr sz="1900" b="0" i="0">
                 <a:solidFill>
                   <a:srgbClr val="242A33"/>
                 </a:solidFill>
@@ -20026,7 +20026,7 @@
               <a:t>•  </a:t>
             </a:r>
             <a:r>
-              <a:rPr sz="2000" b="1" i="0">
+              <a:rPr sz="1900" b="1" i="0">
                 <a:solidFill>
                   <a:srgbClr val="12395B"/>
                 </a:solidFill>
@@ -20036,7 +20036,7 @@
               <a:t>上机 3</a:t>
             </a:r>
             <a:r>
-              <a:rPr sz="2000" b="0" i="0">
+              <a:rPr sz="1900" b="0" i="0">
                 <a:solidFill>
                   <a:srgbClr val="242A33"/>
                 </a:solidFill>
@@ -20046,7 +20046,7 @@
               <a:t>　</a:t>
             </a:r>
             <a:r>
-              <a:rPr sz="2000" b="1" i="0">
+              <a:rPr sz="1900" b="1" i="0">
                 <a:solidFill>
                   <a:srgbClr val="12395B"/>
                 </a:solidFill>
@@ -20056,7 +20056,7 @@
               <a:t>Josephus 问题</a:t>
             </a:r>
             <a:r>
-              <a:rPr sz="2000" b="0" i="0">
+              <a:rPr sz="1900" b="0" i="0">
                 <a:solidFill>
                   <a:srgbClr val="242A33"/>
                 </a:solidFill>
@@ -20064,6 +20064,79 @@
                 <a:ea typeface="微软雅黑"/>
               </a:rPr>
               <a:t>：n 个人围坐，从第 s 个起数到第 m 出列</a:t>
+            </a:r>
+          </a:p>
+          <a:p>
+            <a:pPr algn="l">
+              <a:lnSpc>
+                <a:spcPct val="132000"/>
+              </a:lnSpc>
+              <a:spcBef>
+                <a:spcPts val="0"/>
+              </a:spcBef>
+              <a:spcAft>
+                <a:spcPts val="1178"/>
+              </a:spcAft>
+            </a:pPr>
+            <a:r>
+              <a:rPr sz="1900" b="0" i="0">
+                <a:solidFill>
+                  <a:srgbClr val="242A33"/>
+                </a:solidFill>
+                <a:latin typeface="Segoe UI"/>
+                <a:ea typeface="微软雅黑"/>
+              </a:rPr>
+              <a:t>•  </a:t>
+            </a:r>
+            <a:r>
+              <a:rPr sz="1900" b="1" i="0">
+                <a:solidFill>
+                  <a:srgbClr val="12395B"/>
+                </a:solidFill>
+                <a:latin typeface="Segoe UI"/>
+                <a:ea typeface="微软雅黑"/>
+              </a:rPr>
+              <a:t>这一页和讲义里都是选讲。</a:t>
+            </a:r>
+            <a:r>
+              <a:rPr sz="1900" b="0" i="0">
+                <a:solidFill>
+                  <a:srgbClr val="242A33"/>
+                </a:solidFill>
+                <a:latin typeface="Segoe UI"/>
+                <a:ea typeface="微软雅黑"/>
+              </a:rPr>
+              <a:t> 原书全部 </a:t>
+            </a:r>
+            <a:r>
+              <a:rPr sz="1900" b="1" i="0">
+                <a:solidFill>
+                  <a:srgbClr val="12395B"/>
+                </a:solidFill>
+                <a:latin typeface="Segoe UI"/>
+                <a:ea typeface="微软雅黑"/>
+              </a:rPr>
+              <a:t>345 道</a:t>
+            </a:r>
+            <a:r>
+              <a:rPr sz="1900" b="0" i="0">
+                <a:solidFill>
+                  <a:srgbClr val="242A33"/>
+                </a:solidFill>
+                <a:latin typeface="Segoe UI"/>
+                <a:ea typeface="微软雅黑"/>
+              </a:rPr>
+              <a:t>习题与上机题的参考答案，在 </a:t>
+            </a:r>
+            <a:r>
+              <a:rPr sz="1786" b="0" i="0">
+                <a:solidFill>
+                  <a:srgbClr val="242A33"/>
+                </a:solidFill>
+                <a:latin typeface="Consolas"/>
+                <a:ea typeface="Consolas"/>
+              </a:rPr>
+              <a:t>book/习题与参考答案.md</a:t>
             </a:r>
           </a:p>
         </p:txBody>
